--- a/genekor.pptx
+++ b/genekor.pptx
@@ -122,6 +122,11 @@
       </a:defRPr>
     </a:lvl9pPr>
   </p:defaultTextStyle>
+  <p:extLst>
+    <p:ext uri="{EFAFB233-063F-42B5-8137-9DF3F51BA10A}">
+      <p15:sldGuideLst xmlns:p15="http://schemas.microsoft.com/office/powerpoint/2012/main"/>
+    </p:ext>
+  </p:extLst>
 </p:presentation>
 </file>
 
@@ -18775,7 +18780,7 @@
           <a:p>
             <a:fld id="{296A8592-3634-414B-8ED0-2D974779906C}" type="datetimeFigureOut">
               <a:rPr lang="el-GR" smtClean="0"/>
-              <a:t>13/8/2025</a:t>
+              <a:t>25/8/2025</a:t>
             </a:fld>
             <a:endParaRPr lang="el-GR"/>
           </a:p>
@@ -18973,7 +18978,7 @@
           <a:p>
             <a:fld id="{296A8592-3634-414B-8ED0-2D974779906C}" type="datetimeFigureOut">
               <a:rPr lang="el-GR" smtClean="0"/>
-              <a:t>13/8/2025</a:t>
+              <a:t>25/8/2025</a:t>
             </a:fld>
             <a:endParaRPr lang="el-GR"/>
           </a:p>
@@ -19181,7 +19186,7 @@
           <a:p>
             <a:fld id="{296A8592-3634-414B-8ED0-2D974779906C}" type="datetimeFigureOut">
               <a:rPr lang="el-GR" smtClean="0"/>
-              <a:t>13/8/2025</a:t>
+              <a:t>25/8/2025</a:t>
             </a:fld>
             <a:endParaRPr lang="el-GR"/>
           </a:p>
@@ -19379,7 +19384,7 @@
           <a:p>
             <a:fld id="{296A8592-3634-414B-8ED0-2D974779906C}" type="datetimeFigureOut">
               <a:rPr lang="el-GR" smtClean="0"/>
-              <a:t>13/8/2025</a:t>
+              <a:t>25/8/2025</a:t>
             </a:fld>
             <a:endParaRPr lang="el-GR"/>
           </a:p>
@@ -19654,7 +19659,7 @@
           <a:p>
             <a:fld id="{296A8592-3634-414B-8ED0-2D974779906C}" type="datetimeFigureOut">
               <a:rPr lang="el-GR" smtClean="0"/>
-              <a:t>13/8/2025</a:t>
+              <a:t>25/8/2025</a:t>
             </a:fld>
             <a:endParaRPr lang="el-GR"/>
           </a:p>
@@ -19919,7 +19924,7 @@
           <a:p>
             <a:fld id="{296A8592-3634-414B-8ED0-2D974779906C}" type="datetimeFigureOut">
               <a:rPr lang="el-GR" smtClean="0"/>
-              <a:t>13/8/2025</a:t>
+              <a:t>25/8/2025</a:t>
             </a:fld>
             <a:endParaRPr lang="el-GR"/>
           </a:p>
@@ -20331,7 +20336,7 @@
           <a:p>
             <a:fld id="{296A8592-3634-414B-8ED0-2D974779906C}" type="datetimeFigureOut">
               <a:rPr lang="el-GR" smtClean="0"/>
-              <a:t>13/8/2025</a:t>
+              <a:t>25/8/2025</a:t>
             </a:fld>
             <a:endParaRPr lang="el-GR"/>
           </a:p>
@@ -20472,7 +20477,7 @@
           <a:p>
             <a:fld id="{296A8592-3634-414B-8ED0-2D974779906C}" type="datetimeFigureOut">
               <a:rPr lang="el-GR" smtClean="0"/>
-              <a:t>13/8/2025</a:t>
+              <a:t>25/8/2025</a:t>
             </a:fld>
             <a:endParaRPr lang="el-GR"/>
           </a:p>
@@ -20585,7 +20590,7 @@
           <a:p>
             <a:fld id="{296A8592-3634-414B-8ED0-2D974779906C}" type="datetimeFigureOut">
               <a:rPr lang="el-GR" smtClean="0"/>
-              <a:t>13/8/2025</a:t>
+              <a:t>25/8/2025</a:t>
             </a:fld>
             <a:endParaRPr lang="el-GR"/>
           </a:p>
@@ -20896,7 +20901,7 @@
           <a:p>
             <a:fld id="{296A8592-3634-414B-8ED0-2D974779906C}" type="datetimeFigureOut">
               <a:rPr lang="el-GR" smtClean="0"/>
-              <a:t>13/8/2025</a:t>
+              <a:t>25/8/2025</a:t>
             </a:fld>
             <a:endParaRPr lang="el-GR"/>
           </a:p>
@@ -21184,7 +21189,7 @@
           <a:p>
             <a:fld id="{296A8592-3634-414B-8ED0-2D974779906C}" type="datetimeFigureOut">
               <a:rPr lang="el-GR" smtClean="0"/>
-              <a:t>13/8/2025</a:t>
+              <a:t>25/8/2025</a:t>
             </a:fld>
             <a:endParaRPr lang="el-GR"/>
           </a:p>
@@ -21425,7 +21430,7 @@
           <a:p>
             <a:fld id="{296A8592-3634-414B-8ED0-2D974779906C}" type="datetimeFigureOut">
               <a:rPr lang="el-GR" smtClean="0"/>
-              <a:t>13/8/2025</a:t>
+              <a:t>25/8/2025</a:t>
             </a:fld>
             <a:endParaRPr lang="el-GR"/>
           </a:p>
@@ -21928,7 +21933,7 @@
         </p:nvSpPr>
         <p:spPr>
           <a:xfrm>
-            <a:off x="838200" y="1490492"/>
+            <a:off x="838199" y="635370"/>
             <a:ext cx="9607826" cy="1126680"/>
           </a:xfrm>
         </p:spPr>
@@ -22337,7 +22342,7 @@
             <a:round/>
             <a:extLst>
               <a:ext uri="{C807C97D-BFC1-408E-A445-0C87EB9F89A2}">
-                <ask:lineSketchStyleProps xmlns="" xmlns:ask="http://schemas.microsoft.com/office/drawing/2018/sketchyshapes" sd="1219033472">
+                <ask:lineSketchStyleProps xmlns:ask="http://schemas.microsoft.com/office/drawing/2018/sketchyshapes" xmlns="" sd="1219033472">
                   <a:prstGeom prst="rect">
                     <a:avLst/>
                   </a:prstGeom>
@@ -22443,6 +22448,58 @@
               <a:t>July – August 2025</a:t>
             </a:r>
             <a:endParaRPr lang="el-GR" sz="2800" dirty="0"/>
+          </a:p>
+        </p:txBody>
+      </p:sp>
+      <p:sp>
+        <p:nvSpPr>
+          <p:cNvPr id="6" name="TextBox 5">
+            <a:extLst>
+              <a:ext uri="{FF2B5EF4-FFF2-40B4-BE49-F238E27FC236}">
+                <a16:creationId xmlns:a16="http://schemas.microsoft.com/office/drawing/2014/main" id="{EA8BDE75-1D4F-4204-865C-BEC442130EC9}"/>
+              </a:ext>
+            </a:extLst>
+          </p:cNvPr>
+          <p:cNvSpPr txBox="1"/>
+          <p:nvPr/>
+        </p:nvSpPr>
+        <p:spPr>
+          <a:xfrm>
+            <a:off x="838199" y="1986874"/>
+            <a:ext cx="10790583" cy="707886"/>
+          </a:xfrm>
+          <a:prstGeom prst="rect">
+            <a:avLst/>
+          </a:prstGeom>
+          <a:noFill/>
+        </p:spPr>
+        <p:txBody>
+          <a:bodyPr wrap="square" rtlCol="0">
+            <a:spAutoFit/>
+          </a:bodyPr>
+          <a:lstStyle/>
+          <a:p>
+            <a:r>
+              <a:rPr lang="en-US" sz="4000" b="1" dirty="0">
+                <a:effectLst>
+                  <a:outerShdw blurRad="38100" dist="38100" dir="2700000" algn="tl">
+                    <a:srgbClr val="000000">
+                      <a:alpha val="43137"/>
+                    </a:srgbClr>
+                  </a:outerShdw>
+                </a:effectLst>
+              </a:rPr>
+              <a:t>Automated ACMG-Based Variant Classification</a:t>
+            </a:r>
+            <a:endParaRPr lang="el-GR" sz="4000" b="1" dirty="0">
+              <a:effectLst>
+                <a:outerShdw blurRad="38100" dist="38100" dir="2700000" algn="tl">
+                  <a:srgbClr val="000000">
+                    <a:alpha val="43137"/>
+                  </a:srgbClr>
+                </a:outerShdw>
+              </a:effectLst>
+            </a:endParaRPr>
           </a:p>
         </p:txBody>
       </p:sp>
@@ -23205,7 +23262,7 @@
             <a:round/>
             <a:extLst>
               <a:ext uri="{C807C97D-BFC1-408E-A445-0C87EB9F89A2}">
-                <ask:lineSketchStyleProps xmlns="" xmlns:ask="http://schemas.microsoft.com/office/drawing/2018/sketchyshapes" sd="2727557108">
+                <ask:lineSketchStyleProps xmlns:ask="http://schemas.microsoft.com/office/drawing/2018/sketchyshapes" xmlns="" sd="2727557108">
                   <a:prstGeom prst="rect">
                     <a:avLst/>
                   </a:prstGeom>
@@ -23713,7 +23770,7 @@
             <a:round/>
             <a:extLst>
               <a:ext uri="{C807C97D-BFC1-408E-A445-0C87EB9F89A2}">
-                <ask:lineSketchStyleProps xmlns="" xmlns:ask="http://schemas.microsoft.com/office/drawing/2018/sketchyshapes" sd="1219033472">
+                <ask:lineSketchStyleProps xmlns:ask="http://schemas.microsoft.com/office/drawing/2018/sketchyshapes" xmlns="" sd="1219033472">
                   <a:prstGeom prst="rect">
                     <a:avLst/>
                   </a:prstGeom>
@@ -24339,7 +24396,7 @@
             <a:round/>
             <a:extLst>
               <a:ext uri="{C807C97D-BFC1-408E-A445-0C87EB9F89A2}">
-                <ask:lineSketchStyleProps xmlns="" xmlns:ask="http://schemas.microsoft.com/office/drawing/2018/sketchyshapes" sd="1219033472">
+                <ask:lineSketchStyleProps xmlns:ask="http://schemas.microsoft.com/office/drawing/2018/sketchyshapes" xmlns="" sd="1219033472">
                   <a:prstGeom prst="rect">
                     <a:avLst/>
                   </a:prstGeom>
@@ -25736,7 +25793,7 @@
             <a:round/>
             <a:extLst>
               <a:ext uri="{C807C97D-BFC1-408E-A445-0C87EB9F89A2}">
-                <ask:lineSketchStyleProps xmlns="" xmlns:ask="http://schemas.microsoft.com/office/drawing/2018/sketchyshapes" sd="1219033472">
+                <ask:lineSketchStyleProps xmlns:ask="http://schemas.microsoft.com/office/drawing/2018/sketchyshapes" xmlns="" sd="1219033472">
                   <a:prstGeom prst="rect">
                     <a:avLst/>
                   </a:prstGeom>
@@ -29114,7 +29171,7 @@
             <a:round/>
             <a:extLst>
               <a:ext uri="{C807C97D-BFC1-408E-A445-0C87EB9F89A2}">
-                <ask:lineSketchStyleProps xmlns="" xmlns:ask="http://schemas.microsoft.com/office/drawing/2018/sketchyshapes" sd="1219033472">
+                <ask:lineSketchStyleProps xmlns:ask="http://schemas.microsoft.com/office/drawing/2018/sketchyshapes" xmlns="" sd="1219033472">
                   <a:prstGeom prst="rect">
                     <a:avLst/>
                   </a:prstGeom>
@@ -30960,7 +31017,7 @@
             <a:round/>
             <a:extLst>
               <a:ext uri="{C807C97D-BFC1-408E-A445-0C87EB9F89A2}">
-                <ask:lineSketchStyleProps xmlns="" xmlns:ask="http://schemas.microsoft.com/office/drawing/2018/sketchyshapes" sd="1219033472">
+                <ask:lineSketchStyleProps xmlns:ask="http://schemas.microsoft.com/office/drawing/2018/sketchyshapes" xmlns="" sd="1219033472">
                   <a:prstGeom prst="rect">
                     <a:avLst/>
                   </a:prstGeom>
@@ -32071,7 +32128,7 @@
             <a:round/>
             <a:extLst>
               <a:ext uri="{C807C97D-BFC1-408E-A445-0C87EB9F89A2}">
-                <ask:lineSketchStyleProps xmlns="" xmlns:ask="http://schemas.microsoft.com/office/drawing/2018/sketchyshapes" sd="2727557108">
+                <ask:lineSketchStyleProps xmlns:ask="http://schemas.microsoft.com/office/drawing/2018/sketchyshapes" xmlns="" sd="2727557108">
                   <a:prstGeom prst="rect">
                     <a:avLst/>
                   </a:prstGeom>
@@ -33095,7 +33152,7 @@
             <a:round/>
             <a:extLst>
               <a:ext uri="{C807C97D-BFC1-408E-A445-0C87EB9F89A2}">
-                <ask:lineSketchStyleProps xmlns="" xmlns:ask="http://schemas.microsoft.com/office/drawing/2018/sketchyshapes" sd="1219033472">
+                <ask:lineSketchStyleProps xmlns:ask="http://schemas.microsoft.com/office/drawing/2018/sketchyshapes" xmlns="" sd="1219033472">
                   <a:prstGeom prst="rect">
                     <a:avLst/>
                   </a:prstGeom>

--- a/genekor.pptx
+++ b/genekor.pptx
@@ -22408,8 +22408,12 @@
           <a:lstStyle/>
           <a:p>
             <a:r>
-              <a:rPr lang="en-US" sz="3600" dirty="0"/>
-              <a:t>Bioinformatics Department</a:t>
+              <a:rPr lang="el-GR" sz="3600" dirty="0"/>
+              <a:t>Τμήμα </a:t>
+            </a:r>
+            <a:r>
+              <a:rPr lang="el-GR" sz="3600" dirty="0" err="1"/>
+              <a:t>Βιοπληροφορικής</a:t>
             </a:r>
             <a:endParaRPr lang="el-GR" sz="3600" dirty="0"/>
           </a:p>
@@ -22430,7 +22434,7 @@
         <p:spPr>
           <a:xfrm>
             <a:off x="838199" y="3970551"/>
-            <a:ext cx="2951922" cy="523220"/>
+            <a:ext cx="4250636" cy="523220"/>
           </a:xfrm>
           <a:prstGeom prst="rect">
             <a:avLst/>
@@ -22444,8 +22448,20 @@
           <a:lstStyle/>
           <a:p>
             <a:r>
+              <a:rPr lang="el-GR" sz="2800" dirty="0"/>
+              <a:t>Ιούλιος</a:t>
+            </a:r>
+            <a:r>
               <a:rPr lang="en-US" sz="2800" dirty="0"/>
-              <a:t>July – August 2025</a:t>
+              <a:t> – </a:t>
+            </a:r>
+            <a:r>
+              <a:rPr lang="el-GR" sz="2800" dirty="0"/>
+              <a:t>Αύγουστος </a:t>
+            </a:r>
+            <a:r>
+              <a:rPr lang="en-US" sz="2800" dirty="0"/>
+              <a:t>2025</a:t>
             </a:r>
             <a:endParaRPr lang="el-GR" sz="2800" dirty="0"/>
           </a:p>
@@ -22465,7 +22481,7 @@
         </p:nvSpPr>
         <p:spPr>
           <a:xfrm>
-            <a:off x="838199" y="1986874"/>
+            <a:off x="838199" y="2158473"/>
             <a:ext cx="10790583" cy="707886"/>
           </a:xfrm>
           <a:prstGeom prst="rect">

--- a/genekor.pptx
+++ b/genekor.pptx
@@ -25986,8 +25986,13 @@
             </a:r>
             <a:r>
               <a:rPr lang="en-US" sz="2200" dirty="0"/>
-              <a:t>α προσθήκη επιπλέον ερωτημάτων</a:t>
+              <a:t>α προσθήκη επιπλέον ερωτ</a:t>
             </a:r>
+            <a:r>
+              <a:rPr lang="el-GR" sz="2200" dirty="0" err="1"/>
+              <a:t>ήματα</a:t>
+            </a:r>
+            <a:endParaRPr lang="en-US" sz="2200" dirty="0"/>
           </a:p>
           <a:p>
             <a:r>
